--- a/classes/parte-0-fundamentos-y-prerrequisitos/024-arquitectura-de-computadores-cpu-registros-y-memoria/clase-024-presentacion.pptx
+++ b/classes/parte-0-fundamentos-y-prerrequisitos/024-arquitectura-de-computadores-cpu-registros-y-memoria/clase-024-presentacion.pptx
@@ -17,6 +17,10 @@
     <p:sldId id="265" r:id="rId16"/>
     <p:sldId id="266" r:id="rId17"/>
     <p:sldId id="267" r:id="rId18"/>
+    <p:sldId id="268" r:id="rId19"/>
+    <p:sldId id="269" r:id="rId20"/>
+    <p:sldId id="270" r:id="rId21"/>
+    <p:sldId id="271" r:id="rId22"/>
   </p:sldIdLst>
   <p:sldSz cx="9144000" cy="6858000" type="screen4x3"/>
   <p:notesSz cx="6858000" cy="9144000"/>
@@ -3198,7 +3202,7 @@
                   <a:srgbClr val="0B3D2E"/>
                 </a:solidFill>
               </a:rPr>
-              <a:t>⚠️ Errores comunes</a:t>
+              <a:t>✍️ Ejercicios</a:t>
             </a:r>
           </a:p>
         </p:txBody>
@@ -3236,67 +3240,97 @@
                   <a:srgbClr val="22282E"/>
                 </a:solidFill>
               </a:rPr>
-              <a:t>•  El desensamblado no se parece al C — Optimizaciones. Compila con -O0 para ver una traducción directa.</a:t>
-            </a:r>
-          </a:p>
-          <a:p>
-            <a:pPr>
-              <a:spcAft>
-                <a:spcPts val="600"/>
-              </a:spcAft>
-            </a:pPr>
-            <a:r>
-              <a:rPr sz="1500">
-                <a:solidFill>
-                  <a:srgbClr val="22282E"/>
-                </a:solidFill>
-              </a:rPr>
-              <a:t>•  gdb no muestra símbolos — Falta información de depuración. Compila con -g.</a:t>
-            </a:r>
-          </a:p>
-          <a:p>
-            <a:pPr>
-              <a:spcAft>
-                <a:spcPts val="600"/>
-              </a:spcAft>
-            </a:pPr>
-            <a:r>
-              <a:rPr sz="1500">
-                <a:solidFill>
-                  <a:srgbClr val="22282E"/>
-                </a:solidFill>
-              </a:rPr>
-              <a:t>•  Direcciones cambian en cada ejecución — ASLR activo. Para estudiar, desactívalo en el lab (setarch -R) con cuidado.</a:t>
-            </a:r>
-          </a:p>
-          <a:p>
-            <a:pPr>
-              <a:spcAft>
-                <a:spcPts val="600"/>
-              </a:spcAft>
-            </a:pPr>
-            <a:r>
-              <a:rPr sz="1500">
-                <a:solidFill>
-                  <a:srgbClr val="22282E"/>
-                </a:solidFill>
-              </a:rPr>
-              <a:t>•  Confundir el orden de bytes — x86 es little-endian; escribe las direcciones al revés byte a byte.</a:t>
-            </a:r>
-          </a:p>
-          <a:p>
-            <a:pPr>
-              <a:spcAft>
-                <a:spcPts val="600"/>
-              </a:spcAft>
-            </a:pPr>
-            <a:r>
-              <a:rPr sz="1500">
-                <a:solidFill>
-                  <a:srgbClr val="22282E"/>
-                </a:solidFill>
-              </a:rPr>
-              <a:t>•  Sintaxis AT&amp;T confusa — Usa -M intel en objdump y set disassembly-flavor intel en gdb.</a:t>
+              <a:t>•  Enumera seis registros de x86-64 y describe la función de cada uno, destacando el papel de RIP, RSP y RBP.</a:t>
+            </a:r>
+          </a:p>
+          <a:p>
+            <a:pPr>
+              <a:spcAft>
+                <a:spcPts val="600"/>
+              </a:spcAft>
+            </a:pPr>
+            <a:r>
+              <a:rPr sz="1500">
+                <a:solidFill>
+                  <a:srgbClr val="22282E"/>
+                </a:solidFill>
+              </a:rPr>
+              <a:t>•  Explica qué guarda la pila cuando se llama a una función y en qué orden se colocan la dirección de retorno, el RBP guardado y las variables locales.</a:t>
+            </a:r>
+          </a:p>
+          <a:p>
+            <a:pPr>
+              <a:spcAft>
+                <a:spcPts val="600"/>
+              </a:spcAft>
+            </a:pPr>
+            <a:r>
+              <a:rPr sz="1500">
+                <a:solidFill>
+                  <a:srgbClr val="22282E"/>
+                </a:solidFill>
+              </a:rPr>
+              <a:t>•  Desensambla una función sencilla y anota a qué construcción del código C corresponde cada instrucción clave.</a:t>
+            </a:r>
+          </a:p>
+          <a:p>
+            <a:pPr>
+              <a:spcAft>
+                <a:spcPts val="600"/>
+              </a:spcAft>
+            </a:pPr>
+            <a:r>
+              <a:rPr sz="1500">
+                <a:solidFill>
+                  <a:srgbClr val="22282E"/>
+                </a:solidFill>
+              </a:rPr>
+              <a:t>•  Escribe en little-endian la secuencia de bytes de la dirección 0x00401136 tal como aparecería en memoria.</a:t>
+            </a:r>
+          </a:p>
+          <a:p>
+            <a:pPr>
+              <a:spcAft>
+                <a:spcPts val="600"/>
+              </a:spcAft>
+            </a:pPr>
+            <a:r>
+              <a:rPr sz="1500">
+                <a:solidFill>
+                  <a:srgbClr val="22282E"/>
+                </a:solidFill>
+              </a:rPr>
+              <a:t>•  Explica paso a paso cómo un overflow de un buffer en la pila puede alterar RIP y desviar la ejecución.</a:t>
+            </a:r>
+          </a:p>
+          <a:p>
+            <a:pPr>
+              <a:spcAft>
+                <a:spcPts val="600"/>
+              </a:spcAft>
+            </a:pPr>
+            <a:r>
+              <a:rPr sz="1500">
+                <a:solidFill>
+                  <a:srgbClr val="22282E"/>
+                </a:solidFill>
+              </a:rPr>
+              <a:t>•  Investiga qué protege cada mitigación —ASLR, NX/DEP y los canarios de pila— y contra qué parte concreta del ataque actúa.</a:t>
+            </a:r>
+          </a:p>
+          <a:p>
+            <a:pPr>
+              <a:spcAft>
+                <a:spcPts val="600"/>
+              </a:spcAft>
+            </a:pPr>
+            <a:r>
+              <a:rPr sz="1500">
+                <a:solidFill>
+                  <a:srgbClr val="22282E"/>
+                </a:solidFill>
+              </a:rPr>
+              <a:t>•  Identifica en un desensamblado la convención System V: señala en qué registros llegan el primer y el segundo argumento de una función.</a:t>
             </a:r>
           </a:p>
         </p:txBody>
@@ -3347,7 +3381,7 @@
                   <a:srgbClr val="0B3D2E"/>
                 </a:solidFill>
               </a:rPr>
-              <a:t>❓ Preguntas frecuentes</a:t>
+              <a:t>📝 Reto verificable</a:t>
             </a:r>
           </a:p>
         </p:txBody>
@@ -3385,52 +3419,22 @@
                   <a:srgbClr val="22282E"/>
                 </a:solidFill>
               </a:rPr>
-              <a:t>•  ❓ ¿Necesito ser experto en ensamblador? No para esta clase: basta reconocer patrones (prólogo/epílogo de función, call/ret) y saber leer registros. La maestría se construye en las partes de exploiting e ingeniería inversa.</a:t>
-            </a:r>
-          </a:p>
-          <a:p>
-            <a:pPr>
-              <a:spcAft>
-                <a:spcPts val="600"/>
-              </a:spcAft>
-            </a:pPr>
-            <a:r>
-              <a:rPr sz="1500">
-                <a:solidFill>
-                  <a:srgbClr val="22282E"/>
-                </a:solidFill>
-              </a:rPr>
-              <a:t>•  ❓ ¿Por qué x86-64 y no ARM? x86-64 domina el escritorio/servidor y casi toda la literatura de exploiting parte de él. Los conceptos (registros, pila, convención de llamada) se trasladan a ARM con cambios de nombres.</a:t>
-            </a:r>
-          </a:p>
-          <a:p>
-            <a:pPr>
-              <a:spcAft>
-                <a:spcPts val="600"/>
-              </a:spcAft>
-            </a:pPr>
-            <a:r>
-              <a:rPr sz="1500">
-                <a:solidFill>
-                  <a:srgbClr val="22282E"/>
-                </a:solidFill>
-              </a:rPr>
-              <a:t>•  ❓ ¿Qué es RIP y por qué es tan importante? Es el puntero de instrucción: apunta a lo que se ejecutará a continuación. Todo el arte del control-flow hijacking consiste en lograr que RIP apunte donde quiere el atacante.</a:t>
-            </a:r>
-          </a:p>
-          <a:p>
-            <a:pPr>
-              <a:spcAft>
-                <a:spcPts val="600"/>
-              </a:spcAft>
-            </a:pPr>
-            <a:r>
-              <a:rPr sz="1500">
-                <a:solidFill>
-                  <a:srgbClr val="22282E"/>
-                </a:solidFill>
-              </a:rPr>
-              <a:t>•  ❓ ¿Estas mitigaciones (ASLR, DEP) hacen imposible el exploiting? Lo dificultan mucho, no lo impiden: existen técnicas (ROP, infoleaks) para eludirlas. Verlas ahora te prepara para entender esa carrera armamentística.</a:t>
+              <a:t>•  Toma un programa en C con una función que reciba argumentos y realice un cálculo. Compílalo con -O0 -g, desensámblalo y, con gdb, produce un "mapa" anotado que muestre: los registros que contienen…</a:t>
+            </a:r>
+          </a:p>
+          <a:p>
+            <a:pPr>
+              <a:spcAft>
+                <a:spcPts val="600"/>
+              </a:spcAft>
+            </a:pPr>
+            <a:r>
+              <a:rPr sz="1500">
+                <a:solidFill>
+                  <a:srgbClr val="22282E"/>
+                </a:solidFill>
+              </a:rPr>
+              <a:t>•  Criterio de aceptación: el mapa identifica correctamente los registros de argumentos según la convención System V, señala la dirección de retorno en el volcado de la pila (x/gx $rsp) y explica de…</a:t>
             </a:r>
           </a:p>
         </p:txBody>
@@ -3481,7 +3485,7 @@
                   <a:srgbClr val="0B3D2E"/>
                 </a:solidFill>
               </a:rPr>
-              <a:t>🔗 Referencias</a:t>
+              <a:t>⚠️ Errores comunes</a:t>
             </a:r>
           </a:p>
         </p:txBody>
@@ -3519,6 +3523,304 @@
                   <a:srgbClr val="22282E"/>
                 </a:solidFill>
               </a:rPr>
+              <a:t>•  El desensamblado no se parece al C — El compilador optimizó. Compila con -O0 para obtener una traducción directa.</a:t>
+            </a:r>
+          </a:p>
+          <a:p>
+            <a:pPr>
+              <a:spcAft>
+                <a:spcPts val="600"/>
+              </a:spcAft>
+            </a:pPr>
+            <a:r>
+              <a:rPr sz="1500">
+                <a:solidFill>
+                  <a:srgbClr val="22282E"/>
+                </a:solidFill>
+              </a:rPr>
+              <a:t>•  gdb no muestra símbolos ni nombres — Falta información de depuración. Compila con -g.</a:t>
+            </a:r>
+          </a:p>
+          <a:p>
+            <a:pPr>
+              <a:spcAft>
+                <a:spcPts val="600"/>
+              </a:spcAft>
+            </a:pPr>
+            <a:r>
+              <a:rPr sz="1500">
+                <a:solidFill>
+                  <a:srgbClr val="22282E"/>
+                </a:solidFill>
+              </a:rPr>
+              <a:t>•  Las direcciones cambian en cada ejecución — ASLR está activo. Para estudiar direcciones estables, desactívalo en el lab (setarch -R) con cuidado.</a:t>
+            </a:r>
+          </a:p>
+          <a:p>
+            <a:pPr>
+              <a:spcAft>
+                <a:spcPts val="600"/>
+              </a:spcAft>
+            </a:pPr>
+            <a:r>
+              <a:rPr sz="1500">
+                <a:solidFill>
+                  <a:srgbClr val="22282E"/>
+                </a:solidFill>
+              </a:rPr>
+              <a:t>•  Confundir el orden de los bytes — x86 es little-endian; escribe e interpreta las direcciones byte a byte al revés.</a:t>
+            </a:r>
+          </a:p>
+          <a:p>
+            <a:pPr>
+              <a:spcAft>
+                <a:spcPts val="600"/>
+              </a:spcAft>
+            </a:pPr>
+            <a:r>
+              <a:rPr sz="1500">
+                <a:solidFill>
+                  <a:srgbClr val="22282E"/>
+                </a:solidFill>
+              </a:rPr>
+              <a:t>•  La sintaxis del ASM resulta confusa — Estás viendo AT&amp;T. Usa -M intel en objdump y set disassembly-flavor intel en gdb.</a:t>
+            </a:r>
+          </a:p>
+          <a:p>
+            <a:pPr>
+              <a:spcAft>
+                <a:spcPts val="600"/>
+              </a:spcAft>
+            </a:pPr>
+            <a:r>
+              <a:rPr sz="1500">
+                <a:solidFill>
+                  <a:srgbClr val="22282E"/>
+                </a:solidFill>
+              </a:rPr>
+              <a:t>•  No encontrar la dirección de retorno en la pila — Estás mirando el offset equivocado respecto a RBP/RSP. Repasa el layout del marco tras el prólogo.</a:t>
+            </a:r>
+          </a:p>
+        </p:txBody>
+      </p:sp>
+    </p:spTree>
+  </p:cSld>
+  <p:clrMapOvr>
+    <a:masterClrMapping/>
+  </p:clrMapOvr>
+</p:sld>
+</file>
+
+<file path=ppt/slides/slide13.xml><?xml version="1.0" encoding="utf-8"?>
+<p:sld xmlns:a="http://schemas.openxmlformats.org/drawingml/2006/main" xmlns:p="http://schemas.openxmlformats.org/presentationml/2006/main" xmlns:r="http://schemas.openxmlformats.org/officeDocument/2006/relationships">
+  <p:cSld>
+    <p:spTree>
+      <p:nvGrpSpPr>
+        <p:cNvPr id="1" name=""/>
+        <p:cNvGrpSpPr/>
+        <p:nvPr/>
+      </p:nvGrpSpPr>
+      <p:grpSpPr/>
+      <p:sp>
+        <p:nvSpPr>
+          <p:cNvPr id="2" name="TextBox 1"/>
+          <p:cNvSpPr txBox="1"/>
+          <p:nvPr/>
+        </p:nvSpPr>
+        <p:spPr>
+          <a:xfrm>
+            <a:off x="457200" y="320040"/>
+            <a:ext cx="8229600" cy="822960"/>
+          </a:xfrm>
+          <a:prstGeom prst="rect">
+            <a:avLst/>
+          </a:prstGeom>
+          <a:noFill/>
+        </p:spPr>
+        <p:txBody>
+          <a:bodyPr wrap="square">
+            <a:spAutoFit/>
+          </a:bodyPr>
+          <a:lstStyle/>
+          <a:p>
+            <a:r>
+              <a:rPr sz="2600" b="1">
+                <a:solidFill>
+                  <a:srgbClr val="0B3D2E"/>
+                </a:solidFill>
+              </a:rPr>
+              <a:t>❓ Preguntas frecuentes</a:t>
+            </a:r>
+          </a:p>
+        </p:txBody>
+      </p:sp>
+      <p:sp>
+        <p:nvSpPr>
+          <p:cNvPr id="3" name="TextBox 2"/>
+          <p:cNvSpPr txBox="1"/>
+          <p:nvPr/>
+        </p:nvSpPr>
+        <p:spPr>
+          <a:xfrm>
+            <a:off x="457200" y="1280160"/>
+            <a:ext cx="8229600" cy="4937760"/>
+          </a:xfrm>
+          <a:prstGeom prst="rect">
+            <a:avLst/>
+          </a:prstGeom>
+          <a:noFill/>
+        </p:spPr>
+        <p:txBody>
+          <a:bodyPr wrap="square">
+            <a:spAutoFit/>
+          </a:bodyPr>
+          <a:lstStyle/>
+          <a:p>
+            <a:pPr>
+              <a:spcAft>
+                <a:spcPts val="600"/>
+              </a:spcAft>
+            </a:pPr>
+            <a:r>
+              <a:rPr sz="1500">
+                <a:solidFill>
+                  <a:srgbClr val="22282E"/>
+                </a:solidFill>
+              </a:rPr>
+              <a:t>•  ❓ ¿Necesito ser experto en ensamblador? No para esta clase. Basta con reconocer patrones (el prólogo y el epílogo de una función, call/ret) y saber leer registros y la pila. La maestría se construye…</a:t>
+            </a:r>
+          </a:p>
+          <a:p>
+            <a:pPr>
+              <a:spcAft>
+                <a:spcPts val="600"/>
+              </a:spcAft>
+            </a:pPr>
+            <a:r>
+              <a:rPr sz="1500">
+                <a:solidFill>
+                  <a:srgbClr val="22282E"/>
+                </a:solidFill>
+              </a:rPr>
+              <a:t>•  ❓ ¿Por qué x86-64 y no ARM? Porque x86-64 domina el escritorio y el servidor, y la mayor parte de la literatura de exploiting parte de él. Los conceptos —registros, pila, convención de llamada…</a:t>
+            </a:r>
+          </a:p>
+          <a:p>
+            <a:pPr>
+              <a:spcAft>
+                <a:spcPts val="600"/>
+              </a:spcAft>
+            </a:pPr>
+            <a:r>
+              <a:rPr sz="1500">
+                <a:solidFill>
+                  <a:srgbClr val="22282E"/>
+                </a:solidFill>
+              </a:rPr>
+              <a:t>•  ❓ ¿Qué es RIP y por qué es tan importante? Es el puntero de instrucción: contiene la dirección de lo que la CPU ejecutará a continuación. Todo el control-flow hijacking consiste en lograr que RIP…</a:t>
+            </a:r>
+          </a:p>
+          <a:p>
+            <a:pPr>
+              <a:spcAft>
+                <a:spcPts val="600"/>
+              </a:spcAft>
+            </a:pPr>
+            <a:r>
+              <a:rPr sz="1500">
+                <a:solidFill>
+                  <a:srgbClr val="22282E"/>
+                </a:solidFill>
+              </a:rPr>
+              <a:t>•  ❓ ¿Estas mitigaciones (ASLR, DEP) hacen imposible el exploiting? Lo dificultan mucho, pero no lo impiden. Existen técnicas para eludirlas: ROP reutiliza código ya presente y ejecutable para sortear…</a:t>
+            </a:r>
+          </a:p>
+        </p:txBody>
+      </p:sp>
+    </p:spTree>
+  </p:cSld>
+  <p:clrMapOvr>
+    <a:masterClrMapping/>
+  </p:clrMapOvr>
+</p:sld>
+</file>
+
+<file path=ppt/slides/slide14.xml><?xml version="1.0" encoding="utf-8"?>
+<p:sld xmlns:a="http://schemas.openxmlformats.org/drawingml/2006/main" xmlns:p="http://schemas.openxmlformats.org/presentationml/2006/main" xmlns:r="http://schemas.openxmlformats.org/officeDocument/2006/relationships">
+  <p:cSld>
+    <p:spTree>
+      <p:nvGrpSpPr>
+        <p:cNvPr id="1" name=""/>
+        <p:cNvGrpSpPr/>
+        <p:nvPr/>
+      </p:nvGrpSpPr>
+      <p:grpSpPr/>
+      <p:sp>
+        <p:nvSpPr>
+          <p:cNvPr id="2" name="TextBox 1"/>
+          <p:cNvSpPr txBox="1"/>
+          <p:nvPr/>
+        </p:nvSpPr>
+        <p:spPr>
+          <a:xfrm>
+            <a:off x="457200" y="320040"/>
+            <a:ext cx="8229600" cy="822960"/>
+          </a:xfrm>
+          <a:prstGeom prst="rect">
+            <a:avLst/>
+          </a:prstGeom>
+          <a:noFill/>
+        </p:spPr>
+        <p:txBody>
+          <a:bodyPr wrap="square">
+            <a:spAutoFit/>
+          </a:bodyPr>
+          <a:lstStyle/>
+          <a:p>
+            <a:r>
+              <a:rPr sz="2600" b="1">
+                <a:solidFill>
+                  <a:srgbClr val="0B3D2E"/>
+                </a:solidFill>
+              </a:rPr>
+              <a:t>🔗 Referencias</a:t>
+            </a:r>
+          </a:p>
+        </p:txBody>
+      </p:sp>
+      <p:sp>
+        <p:nvSpPr>
+          <p:cNvPr id="3" name="TextBox 2"/>
+          <p:cNvSpPr txBox="1"/>
+          <p:nvPr/>
+        </p:nvSpPr>
+        <p:spPr>
+          <a:xfrm>
+            <a:off x="457200" y="1280160"/>
+            <a:ext cx="8229600" cy="4937760"/>
+          </a:xfrm>
+          <a:prstGeom prst="rect">
+            <a:avLst/>
+          </a:prstGeom>
+          <a:noFill/>
+        </p:spPr>
+        <p:txBody>
+          <a:bodyPr wrap="square">
+            <a:spAutoFit/>
+          </a:bodyPr>
+          <a:lstStyle/>
+          <a:p>
+            <a:pPr>
+              <a:spcAft>
+                <a:spcPts val="600"/>
+              </a:spcAft>
+            </a:pPr>
+            <a:r>
+              <a:rPr sz="1500">
+                <a:solidFill>
+                  <a:srgbClr val="22282E"/>
+                </a:solidFill>
+              </a:rPr>
               <a:t>•  Jon Erickson, Hacking: The Art of Exploitation (No Starch Press).</a:t>
             </a:r>
           </a:p>
@@ -3567,8 +3869,173 @@
               <a:t>•  GEF (GDB Enhanced Features) — &lt;https://hugsy.github.io/gef/&gt;</a:t>
             </a:r>
           </a:p>
-        </p:txBody>
-      </p:sp>
+          <a:p>
+            <a:pPr>
+              <a:spcAft>
+                <a:spcPts val="600"/>
+              </a:spcAft>
+            </a:pPr>
+            <a:r>
+              <a:rPr sz="1500">
+                <a:solidFill>
+                  <a:srgbClr val="22282E"/>
+                </a:solidFill>
+              </a:rPr>
+              <a:t>•  man 1 objdump, man 1 gdb</a:t>
+            </a:r>
+          </a:p>
+        </p:txBody>
+      </p:sp>
+    </p:spTree>
+  </p:cSld>
+  <p:clrMapOvr>
+    <a:masterClrMapping/>
+  </p:clrMapOvr>
+</p:sld>
+</file>
+
+<file path=ppt/slides/slide15.xml><?xml version="1.0" encoding="utf-8"?>
+<p:sld xmlns:a="http://schemas.openxmlformats.org/drawingml/2006/main" xmlns:p="http://schemas.openxmlformats.org/presentationml/2006/main" xmlns:r="http://schemas.openxmlformats.org/officeDocument/2006/relationships">
+  <p:cSld>
+    <p:spTree>
+      <p:nvGrpSpPr>
+        <p:cNvPr id="1" name=""/>
+        <p:cNvGrpSpPr/>
+        <p:nvPr/>
+      </p:nvGrpSpPr>
+      <p:grpSpPr/>
+      <p:sp>
+        <p:nvSpPr>
+          <p:cNvPr id="2" name="TextBox 1"/>
+          <p:cNvSpPr txBox="1"/>
+          <p:nvPr/>
+        </p:nvSpPr>
+        <p:spPr>
+          <a:xfrm>
+            <a:off x="457200" y="274320"/>
+            <a:ext cx="8229600" cy="640080"/>
+          </a:xfrm>
+          <a:prstGeom prst="rect">
+            <a:avLst/>
+          </a:prstGeom>
+          <a:noFill/>
+        </p:spPr>
+        <p:txBody>
+          <a:bodyPr wrap="square">
+            <a:spAutoFit/>
+          </a:bodyPr>
+          <a:lstStyle/>
+          <a:p>
+            <a:r>
+              <a:rPr sz="2200" b="1">
+                <a:solidFill>
+                  <a:srgbClr val="0B3D2E"/>
+                </a:solidFill>
+              </a:rPr>
+              <a:t>Diagrama 1</a:t>
+            </a:r>
+          </a:p>
+        </p:txBody>
+      </p:sp>
+      <p:pic>
+        <p:nvPicPr>
+          <p:cNvPr id="3" name="Picture 2" descr="fc65cc2a5e27298a.png"/>
+          <p:cNvPicPr>
+            <a:picLocks noChangeAspect="1"/>
+          </p:cNvPicPr>
+          <p:nvPr/>
+        </p:nvPicPr>
+        <p:blipFill>
+          <a:blip r:embed="rId2"/>
+          <a:stretch>
+            <a:fillRect/>
+          </a:stretch>
+        </p:blipFill>
+        <p:spPr>
+          <a:xfrm>
+            <a:off x="2792360" y="1097280"/>
+            <a:ext cx="3559279" cy="5303520"/>
+          </a:xfrm>
+          <a:prstGeom prst="rect">
+            <a:avLst/>
+          </a:prstGeom>
+        </p:spPr>
+      </p:pic>
+    </p:spTree>
+  </p:cSld>
+  <p:clrMapOvr>
+    <a:masterClrMapping/>
+  </p:clrMapOvr>
+</p:sld>
+</file>
+
+<file path=ppt/slides/slide16.xml><?xml version="1.0" encoding="utf-8"?>
+<p:sld xmlns:a="http://schemas.openxmlformats.org/drawingml/2006/main" xmlns:p="http://schemas.openxmlformats.org/presentationml/2006/main" xmlns:r="http://schemas.openxmlformats.org/officeDocument/2006/relationships">
+  <p:cSld>
+    <p:spTree>
+      <p:nvGrpSpPr>
+        <p:cNvPr id="1" name=""/>
+        <p:cNvGrpSpPr/>
+        <p:nvPr/>
+      </p:nvGrpSpPr>
+      <p:grpSpPr/>
+      <p:sp>
+        <p:nvSpPr>
+          <p:cNvPr id="2" name="TextBox 1"/>
+          <p:cNvSpPr txBox="1"/>
+          <p:nvPr/>
+        </p:nvSpPr>
+        <p:spPr>
+          <a:xfrm>
+            <a:off x="457200" y="274320"/>
+            <a:ext cx="8229600" cy="640080"/>
+          </a:xfrm>
+          <a:prstGeom prst="rect">
+            <a:avLst/>
+          </a:prstGeom>
+          <a:noFill/>
+        </p:spPr>
+        <p:txBody>
+          <a:bodyPr wrap="square">
+            <a:spAutoFit/>
+          </a:bodyPr>
+          <a:lstStyle/>
+          <a:p>
+            <a:r>
+              <a:rPr sz="2200" b="1">
+                <a:solidFill>
+                  <a:srgbClr val="0B3D2E"/>
+                </a:solidFill>
+              </a:rPr>
+              <a:t>Diagrama 2</a:t>
+            </a:r>
+          </a:p>
+        </p:txBody>
+      </p:sp>
+      <p:pic>
+        <p:nvPicPr>
+          <p:cNvPr id="3" name="Picture 2" descr="9f9ad2d6d3713adc.png"/>
+          <p:cNvPicPr>
+            <a:picLocks noChangeAspect="1"/>
+          </p:cNvPicPr>
+          <p:nvPr/>
+        </p:nvPicPr>
+        <p:blipFill>
+          <a:blip r:embed="rId2"/>
+          <a:stretch>
+            <a:fillRect/>
+          </a:stretch>
+        </p:blipFill>
+        <p:spPr>
+          <a:xfrm>
+            <a:off x="457200" y="1460306"/>
+            <a:ext cx="8229600" cy="4577468"/>
+          </a:xfrm>
+          <a:prstGeom prst="rect">
+            <a:avLst/>
+          </a:prstGeom>
+        </p:spPr>
+      </p:pic>
     </p:spTree>
   </p:cSld>
   <p:clrMapOvr>
@@ -3653,7 +4120,7 @@
                   <a:srgbClr val="22282E"/>
                 </a:solidFill>
               </a:rPr>
-              <a:t>•  Entender cómo funciona una CPU a bajo nivel: registros, la pila de llamadas, el ciclo de ejecución y el ensamblador básico. Este conocimiento es el requisito previo indispensable para la explotación binaria, la ingeniería inversa y el análisis de malware que verás en partes avanzadas del programa.</a:t>
+              <a:t>•  Entender cómo funciona una CPU a bajo nivel: sus registros, la pila de llamadas, el ciclo de ejecución de instrucciones y el ensamblador básico que da vida a todo programa. Este conocimiento es el…</a:t>
             </a:r>
           </a:p>
         </p:txBody>
@@ -3757,67 +4224,82 @@
                   <a:srgbClr val="22282E"/>
                 </a:solidFill>
               </a:rPr>
-              <a:t>•  Describir los registros clave de x86-64 y su función.</a:t>
-            </a:r>
-          </a:p>
-          <a:p>
-            <a:pPr>
-              <a:spcAft>
-                <a:spcPts val="600"/>
-              </a:spcAft>
-            </a:pPr>
-            <a:r>
-              <a:rPr sz="1500">
-                <a:solidFill>
-                  <a:srgbClr val="22282E"/>
-                </a:solidFill>
-              </a:rPr>
-              <a:t>•  Explicar el ciclo fetch-decode-execute.</a:t>
-            </a:r>
-          </a:p>
-          <a:p>
-            <a:pPr>
-              <a:spcAft>
-                <a:spcPts val="600"/>
-              </a:spcAft>
-            </a:pPr>
-            <a:r>
-              <a:rPr sz="1500">
-                <a:solidFill>
-                  <a:srgbClr val="22282E"/>
-                </a:solidFill>
-              </a:rPr>
-              <a:t>•  Trazar el uso de la pila en una llamada a función.</a:t>
-            </a:r>
-          </a:p>
-          <a:p>
-            <a:pPr>
-              <a:spcAft>
-                <a:spcPts val="600"/>
-              </a:spcAft>
-            </a:pPr>
-            <a:r>
-              <a:rPr sz="1500">
-                <a:solidFill>
-                  <a:srgbClr val="22282E"/>
-                </a:solidFill>
-              </a:rPr>
-              <a:t>•  Leer ensamblador básico y relacionarlo con código C.</a:t>
-            </a:r>
-          </a:p>
-          <a:p>
-            <a:pPr>
-              <a:spcAft>
-                <a:spcPts val="600"/>
-              </a:spcAft>
-            </a:pPr>
-            <a:r>
-              <a:rPr sz="1500">
-                <a:solidFill>
-                  <a:srgbClr val="22282E"/>
-                </a:solidFill>
-              </a:rPr>
-              <a:t>•  Conectar estos conceptos con vulnerabilidades de memoria.</a:t>
+              <a:t>•  Describir los registros clave de x86-64 y la función de cada uno, en especial RIP, RSP y RBP.</a:t>
+            </a:r>
+          </a:p>
+          <a:p>
+            <a:pPr>
+              <a:spcAft>
+                <a:spcPts val="600"/>
+              </a:spcAft>
+            </a:pPr>
+            <a:r>
+              <a:rPr sz="1500">
+                <a:solidFill>
+                  <a:srgbClr val="22282E"/>
+                </a:solidFill>
+              </a:rPr>
+              <a:t>•  Explicar el ciclo fetch-decode-execute que ejecuta cada instrucción.</a:t>
+            </a:r>
+          </a:p>
+          <a:p>
+            <a:pPr>
+              <a:spcAft>
+                <a:spcPts val="600"/>
+              </a:spcAft>
+            </a:pPr>
+            <a:r>
+              <a:rPr sz="1500">
+                <a:solidFill>
+                  <a:srgbClr val="22282E"/>
+                </a:solidFill>
+              </a:rPr>
+              <a:t>•  Trazar el uso de la pila durante una llamada a función, incluyendo la dirección de retorno.</a:t>
+            </a:r>
+          </a:p>
+          <a:p>
+            <a:pPr>
+              <a:spcAft>
+                <a:spcPts val="600"/>
+              </a:spcAft>
+            </a:pPr>
+            <a:r>
+              <a:rPr sz="1500">
+                <a:solidFill>
+                  <a:srgbClr val="22282E"/>
+                </a:solidFill>
+              </a:rPr>
+              <a:t>•  Leer ensamblador básico (mov, push, pop, call, ret) y relacionarlo con código C.</a:t>
+            </a:r>
+          </a:p>
+          <a:p>
+            <a:pPr>
+              <a:spcAft>
+                <a:spcPts val="600"/>
+              </a:spcAft>
+            </a:pPr>
+            <a:r>
+              <a:rPr sz="1500">
+                <a:solidFill>
+                  <a:srgbClr val="22282E"/>
+                </a:solidFill>
+              </a:rPr>
+              <a:t>•  Conectar estos conceptos con las vulnerabilidades de memoria y sus mitigaciones (ASLR, NX/DEP, canarios).</a:t>
+            </a:r>
+          </a:p>
+          <a:p>
+            <a:pPr>
+              <a:spcAft>
+                <a:spcPts val="600"/>
+              </a:spcAft>
+            </a:pPr>
+            <a:r>
+              <a:rPr sz="1500">
+                <a:solidFill>
+                  <a:srgbClr val="22282E"/>
+                </a:solidFill>
+              </a:rPr>
+              <a:t>•  Aplicar endianness al escribir direcciones al inspeccionar memoria.</a:t>
             </a:r>
           </a:p>
         </p:txBody>
@@ -3996,7 +4478,7 @@
                   <a:srgbClr val="22282E"/>
                 </a:solidFill>
               </a:rPr>
-              <a:t>•  7 — Del C al ASM</a:t>
+              <a:t>•  7 — Del C al ensamblador</a:t>
             </a:r>
           </a:p>
         </p:txBody>
@@ -4047,7 +4529,7 @@
                   <a:srgbClr val="0B3D2E"/>
                 </a:solidFill>
               </a:rPr>
-              <a:t>📖 Definiciones y características</a:t>
+              <a:t>🧠 Explicación en profundidad</a:t>
             </a:r>
           </a:p>
         </p:txBody>
@@ -4085,82 +4567,97 @@
                   <a:srgbClr val="22282E"/>
                 </a:solidFill>
               </a:rPr>
-              <a:t>•  Registro: memoria interna y rapidísima de la CPU. Clave: RIP apunta a la siguiente instrucción; controlarlo = controlar la ejecución.</a:t>
-            </a:r>
-          </a:p>
-          <a:p>
-            <a:pPr>
-              <a:spcAft>
-                <a:spcPts val="600"/>
-              </a:spcAft>
-            </a:pPr>
-            <a:r>
-              <a:rPr sz="1500">
-                <a:solidFill>
-                  <a:srgbClr val="22282E"/>
-                </a:solidFill>
-              </a:rPr>
-              <a:t>•  RSP / RBP: puntero de pila y de marco. Clave: delimitan el marco de la función actual; centrales en overflows de stack.</a:t>
-            </a:r>
-          </a:p>
-          <a:p>
-            <a:pPr>
-              <a:spcAft>
-                <a:spcPts val="600"/>
-              </a:spcAft>
-            </a:pPr>
-            <a:r>
-              <a:rPr sz="1500">
-                <a:solidFill>
-                  <a:srgbClr val="22282E"/>
-                </a:solidFill>
-              </a:rPr>
-              <a:t>•  Pila (stack): estructura LIFO que crece hacia direcciones bajas en x86. Clave: guarda dirección de retorno y locales.</a:t>
-            </a:r>
-          </a:p>
-          <a:p>
-            <a:pPr>
-              <a:spcAft>
-                <a:spcPts val="600"/>
-              </a:spcAft>
-            </a:pPr>
-            <a:r>
-              <a:rPr sz="1500">
-                <a:solidFill>
-                  <a:srgbClr val="22282E"/>
-                </a:solidFill>
-              </a:rPr>
-              <a:t>•  call / ret: call apila la dirección de retorno y salta; ret la desapila a RIP. Clave: sobrescribir esa dirección desvía el flujo.</a:t>
-            </a:r>
-          </a:p>
-          <a:p>
-            <a:pPr>
-              <a:spcAft>
-                <a:spcPts val="600"/>
-              </a:spcAft>
-            </a:pPr>
-            <a:r>
-              <a:rPr sz="1500">
-                <a:solidFill>
-                  <a:srgbClr val="22282E"/>
-                </a:solidFill>
-              </a:rPr>
-              <a:t>•  Endianness: orden de bytes (x86 es little-endian). Clave: al escribir direcciones en un exploit hay que respetarlo.</a:t>
-            </a:r>
-          </a:p>
-          <a:p>
-            <a:pPr>
-              <a:spcAft>
-                <a:spcPts val="600"/>
-              </a:spcAft>
-            </a:pPr>
-            <a:r>
-              <a:rPr sz="1500">
-                <a:solidFill>
-                  <a:srgbClr val="22282E"/>
-                </a:solidFill>
-              </a:rPr>
-              <a:t>•  Convención de llamada (System V): argumentos en RDI, RSI, RDX, RCX, R8, R9. Clave: saber dónde están los parámetros al leer ASM.</a:t>
+              <a:t>•  En su núcleo, una CPU hace una sola cosa repetida a miles de millones de veces por segundo: ejecutar el ciclo fetch-decode-execute. En la fase de fetch, la CPU lee de memoria la instrucción a la que…</a:t>
+            </a:r>
+          </a:p>
+          <a:p>
+            <a:pPr>
+              <a:spcAft>
+                <a:spcPts val="600"/>
+              </a:spcAft>
+            </a:pPr>
+            <a:r>
+              <a:rPr sz="1500">
+                <a:solidFill>
+                  <a:srgbClr val="22282E"/>
+                </a:solidFill>
+              </a:rPr>
+              <a:t>•  Los registros son pequeñas celdas de almacenamiento dentro de la propia CPU, órdenes de magnitud más rápidas que la RAM. En x86-64 hay un conjunto de registros de propósito general de 64 bits (RAX…</a:t>
+            </a:r>
+          </a:p>
+          <a:p>
+            <a:pPr>
+              <a:spcAft>
+                <a:spcPts val="600"/>
+              </a:spcAft>
+            </a:pPr>
+            <a:r>
+              <a:rPr sz="1500">
+                <a:solidFill>
+                  <a:srgbClr val="22282E"/>
+                </a:solidFill>
+              </a:rPr>
+              <a:t>•  La pila (stack) es una región de memoria que funciona como estructura LIFO (last-in, first-out) y que, en x86-64, crece hacia direcciones más bajas. Es donde el programa guarda las variables locales…</a:t>
+            </a:r>
+          </a:p>
+          <a:p>
+            <a:pPr>
+              <a:spcAft>
+                <a:spcPts val="600"/>
+              </a:spcAft>
+            </a:pPr>
+            <a:r>
+              <a:rPr sz="1500">
+                <a:solidFill>
+                  <a:srgbClr val="22282E"/>
+                </a:solidFill>
+              </a:rPr>
+              <a:t>•  El diagrama hay que leerlo de abajo arriba, porque ese es el sentido en el que</a:t>
+            </a:r>
+          </a:p>
+          <a:p>
+            <a:pPr>
+              <a:spcAft>
+                <a:spcPts val="600"/>
+              </a:spcAft>
+            </a:pPr>
+            <a:r>
+              <a:rPr sz="1500">
+                <a:solidFill>
+                  <a:srgbClr val="22282E"/>
+                </a:solidFill>
+              </a:rPr>
+              <a:t>•  escribe un desbordamiento: el buffer vive en la zona baja del marco, y al pasarse</a:t>
+            </a:r>
+          </a:p>
+          <a:p>
+            <a:pPr>
+              <a:spcAft>
+                <a:spcPts val="600"/>
+              </a:spcAft>
+            </a:pPr>
+            <a:r>
+              <a:rPr sz="1500">
+                <a:solidFill>
+                  <a:srgbClr val="22282E"/>
+                </a:solidFill>
+              </a:rPr>
+              <a:t>•  de tamaño avanza primero sobre el RBP guardado y solo después sobre la dirección de</a:t>
+            </a:r>
+          </a:p>
+          <a:p>
+            <a:pPr>
+              <a:spcAft>
+                <a:spcPts val="600"/>
+              </a:spcAft>
+            </a:pPr>
+            <a:r>
+              <a:rPr sz="1500">
+                <a:solidFill>
+                  <a:srgbClr val="22282E"/>
+                </a:solidFill>
+              </a:rPr>
+              <a:t>•  retorno. Esa distancia —cuántos bytes hay entre el inicio del buffer y la dirección</a:t>
             </a:r>
           </a:p>
         </p:txBody>
@@ -4211,7 +4708,7 @@
                   <a:srgbClr val="0B3D2E"/>
                 </a:solidFill>
               </a:rPr>
-              <a:t>🧰 Herramientas y preparación</a:t>
+              <a:t>📖 Definiciones y características</a:t>
             </a:r>
           </a:p>
         </p:txBody>
@@ -4249,37 +4746,97 @@
                   <a:srgbClr val="22282E"/>
                 </a:solidFill>
               </a:rPr>
-              <a:t>•  En Linux/Kali: gcc, objdump, gdb (idealmente con GEF o pwndbg), readelf. Instala GEF:</a:t>
-            </a:r>
-          </a:p>
-          <a:p>
-            <a:pPr>
-              <a:spcAft>
-                <a:spcPts val="600"/>
-              </a:spcAft>
-            </a:pPr>
-            <a:r>
-              <a:rPr sz="1500">
-                <a:solidFill>
-                  <a:srgbClr val="22282E"/>
-                </a:solidFill>
-              </a:rPr>
-              <a:t>•  bash -c "$(curl -fsSL https://gef.blah.cat/sh)"</a:t>
-            </a:r>
-          </a:p>
-          <a:p>
-            <a:pPr>
-              <a:spcAft>
-                <a:spcPts val="600"/>
-              </a:spcAft>
-            </a:pPr>
-            <a:r>
-              <a:rPr sz="1500">
-                <a:solidFill>
-                  <a:srgbClr val="22282E"/>
-                </a:solidFill>
-              </a:rPr>
-              <a:t>•  Trabaja en tu VM de laboratorio. Un programa C sencillo servirá para compilar, desensamblar y depurar.</a:t>
+              <a:t>•  Registro: celda de almacenamiento interna de la CPU, extremadamente rápida. Las instrucciones operan sobre registros; RIP apunta a la siguiente instrucción, así que controlarlo equivale a controlar…</a:t>
+            </a:r>
+          </a:p>
+          <a:p>
+            <a:pPr>
+              <a:spcAft>
+                <a:spcPts val="600"/>
+              </a:spcAft>
+            </a:pPr>
+            <a:r>
+              <a:rPr sz="1500">
+                <a:solidFill>
+                  <a:srgbClr val="22282E"/>
+                </a:solidFill>
+              </a:rPr>
+              <a:t>•  RIP (instruction pointer): registro que contiene la dirección de la próxima instrucción a ejecutar. Es el objetivo final de un exploit de secuestro de flujo: quien controla RIP controla qué ejecuta…</a:t>
+            </a:r>
+          </a:p>
+          <a:p>
+            <a:pPr>
+              <a:spcAft>
+                <a:spcPts val="600"/>
+              </a:spcAft>
+            </a:pPr>
+            <a:r>
+              <a:rPr sz="1500">
+                <a:solidFill>
+                  <a:srgbClr val="22282E"/>
+                </a:solidFill>
+              </a:rPr>
+              <a:t>•  RSP / RBP: puntero de pila (cima) y puntero de marco (base de la función actual). Delimitan el marco de la función y son centrales en el análisis y la explotación de overflows de pila.</a:t>
+            </a:r>
+          </a:p>
+          <a:p>
+            <a:pPr>
+              <a:spcAft>
+                <a:spcPts val="600"/>
+              </a:spcAft>
+            </a:pPr>
+            <a:r>
+              <a:rPr sz="1500">
+                <a:solidFill>
+                  <a:srgbClr val="22282E"/>
+                </a:solidFill>
+              </a:rPr>
+              <a:t>•  Pila (stack): estructura de memoria LIFO que en x86 crece hacia direcciones bajas. Almacena la dirección de retorno, el marco anterior y las variables locales, lo que la convierte en objetivo del…</a:t>
+            </a:r>
+          </a:p>
+          <a:p>
+            <a:pPr>
+              <a:spcAft>
+                <a:spcPts val="600"/>
+              </a:spcAft>
+            </a:pPr>
+            <a:r>
+              <a:rPr sz="1500">
+                <a:solidFill>
+                  <a:srgbClr val="22282E"/>
+                </a:solidFill>
+              </a:rPr>
+              <a:t>•  call / ret: call apila la dirección de retorno y salta a la función; ret desapila esa dirección a RIP. Sobrescribir la dirección de retorno antes del ret es el mecanismo del stack overflow clásico.</a:t>
+            </a:r>
+          </a:p>
+          <a:p>
+            <a:pPr>
+              <a:spcAft>
+                <a:spcPts val="600"/>
+              </a:spcAft>
+            </a:pPr>
+            <a:r>
+              <a:rPr sz="1500">
+                <a:solidFill>
+                  <a:srgbClr val="22282E"/>
+                </a:solidFill>
+              </a:rPr>
+              <a:t>•  Convención de llamada System V: contrato que pasa los primeros seis argumentos enteros en RDI, RSI, RDX, RCX, R8 y R9, y devuelve en RAX. Saber esto permite leer un desensamblado e identificar los…</a:t>
+            </a:r>
+          </a:p>
+          <a:p>
+            <a:pPr>
+              <a:spcAft>
+                <a:spcPts val="600"/>
+              </a:spcAft>
+            </a:pPr>
+            <a:r>
+              <a:rPr sz="1500">
+                <a:solidFill>
+                  <a:srgbClr val="22282E"/>
+                </a:solidFill>
+              </a:rPr>
+              <a:t>•  Endianness: orden de los bytes de un valor multibyte en memoria; x86-64 es little-endian (byte menos significativo primero). Debe respetarse al escribir direcciones en un exploit o al interpretar un…</a:t>
             </a:r>
           </a:p>
         </p:txBody>
@@ -4330,7 +4887,7 @@
                   <a:srgbClr val="0B3D2E"/>
                 </a:solidFill>
               </a:rPr>
-              <a:t>🧪 Laboratorio guiado</a:t>
+              <a:t>📔 Glosario</a:t>
             </a:r>
           </a:p>
         </p:txBody>
@@ -4368,97 +4925,97 @@
                   <a:srgbClr val="22282E"/>
                 </a:solidFill>
               </a:rPr>
-              <a:t>•  Compilar y desensamblar. Crea suma.c con una función suma(a,b) y main:</a:t>
-            </a:r>
-          </a:p>
-          <a:p>
-            <a:pPr>
-              <a:spcAft>
-                <a:spcPts val="600"/>
-              </a:spcAft>
-            </a:pPr>
-            <a:r>
-              <a:rPr sz="1500">
-                <a:solidFill>
-                  <a:srgbClr val="22282E"/>
-                </a:solidFill>
-              </a:rPr>
-              <a:t>•  gcc -O0 -g suma.c -o suma</a:t>
-            </a:r>
-          </a:p>
-          <a:p>
-            <a:pPr>
-              <a:spcAft>
-                <a:spcPts val="600"/>
-              </a:spcAft>
-            </a:pPr>
-            <a:r>
-              <a:rPr sz="1500">
-                <a:solidFill>
-                  <a:srgbClr val="22282E"/>
-                </a:solidFill>
-              </a:rPr>
-              <a:t>•  objdump -d -M intel suma | sed -n '/&lt;suma&gt;:/,/ret/p'</a:t>
-            </a:r>
-          </a:p>
-          <a:p>
-            <a:pPr>
-              <a:spcAft>
-                <a:spcPts val="600"/>
-              </a:spcAft>
-            </a:pPr>
-            <a:r>
-              <a:rPr sz="1500">
-                <a:solidFill>
-                  <a:srgbClr val="22282E"/>
-                </a:solidFill>
-              </a:rPr>
-              <a:t>•  Identifica push rbp, mov rbp, rsp, las operaciones y ret.</a:t>
-            </a:r>
-          </a:p>
-          <a:p>
-            <a:pPr>
-              <a:spcAft>
-                <a:spcPts val="600"/>
-              </a:spcAft>
-            </a:pPr>
-            <a:r>
-              <a:rPr sz="1500">
-                <a:solidFill>
-                  <a:srgbClr val="22282E"/>
-                </a:solidFill>
-              </a:rPr>
-              <a:t>•  Registros en gdb:</a:t>
-            </a:r>
-          </a:p>
-          <a:p>
-            <a:pPr>
-              <a:spcAft>
-                <a:spcPts val="600"/>
-              </a:spcAft>
-            </a:pPr>
-            <a:r>
-              <a:rPr sz="1500">
-                <a:solidFill>
-                  <a:srgbClr val="22282E"/>
-                </a:solidFill>
-              </a:rPr>
-              <a:t>•  gdb ./suma</a:t>
-            </a:r>
-          </a:p>
-          <a:p>
-            <a:pPr>
-              <a:spcAft>
-                <a:spcPts val="600"/>
-              </a:spcAft>
-            </a:pPr>
-            <a:r>
-              <a:rPr sz="1500">
-                <a:solidFill>
-                  <a:srgbClr val="22282E"/>
-                </a:solidFill>
-              </a:rPr>
-              <a:t>•  (gdb) break suma</a:t>
+              <a:t>•  Término — Definición concisa</a:t>
+            </a:r>
+          </a:p>
+          <a:p>
+            <a:pPr>
+              <a:spcAft>
+                <a:spcPts val="600"/>
+              </a:spcAft>
+            </a:pPr>
+            <a:r>
+              <a:rPr sz="1500">
+                <a:solidFill>
+                  <a:srgbClr val="22282E"/>
+                </a:solidFill>
+              </a:rPr>
+              <a:t>•  CPU — Unidad de procesamiento que ejecuta instrucciones</a:t>
+            </a:r>
+          </a:p>
+          <a:p>
+            <a:pPr>
+              <a:spcAft>
+                <a:spcPts val="600"/>
+              </a:spcAft>
+            </a:pPr>
+            <a:r>
+              <a:rPr sz="1500">
+                <a:solidFill>
+                  <a:srgbClr val="22282E"/>
+                </a:solidFill>
+              </a:rPr>
+              <a:t>•  Registro — Almacenamiento interno rapidísimo de la CPU</a:t>
+            </a:r>
+          </a:p>
+          <a:p>
+            <a:pPr>
+              <a:spcAft>
+                <a:spcPts val="600"/>
+              </a:spcAft>
+            </a:pPr>
+            <a:r>
+              <a:rPr sz="1500">
+                <a:solidFill>
+                  <a:srgbClr val="22282E"/>
+                </a:solidFill>
+              </a:rPr>
+              <a:t>•  RIP — Puntero a la siguiente instrucción</a:t>
+            </a:r>
+          </a:p>
+          <a:p>
+            <a:pPr>
+              <a:spcAft>
+                <a:spcPts val="600"/>
+              </a:spcAft>
+            </a:pPr>
+            <a:r>
+              <a:rPr sz="1500">
+                <a:solidFill>
+                  <a:srgbClr val="22282E"/>
+                </a:solidFill>
+              </a:rPr>
+              <a:t>•  RSP — Puntero a la cima de la pila</a:t>
+            </a:r>
+          </a:p>
+          <a:p>
+            <a:pPr>
+              <a:spcAft>
+                <a:spcPts val="600"/>
+              </a:spcAft>
+            </a:pPr>
+            <a:r>
+              <a:rPr sz="1500">
+                <a:solidFill>
+                  <a:srgbClr val="22282E"/>
+                </a:solidFill>
+              </a:rPr>
+              <a:t>•  RBP — Puntero a la base del marco actual</a:t>
+            </a:r>
+          </a:p>
+          <a:p>
+            <a:pPr>
+              <a:spcAft>
+                <a:spcPts val="600"/>
+              </a:spcAft>
+            </a:pPr>
+            <a:r>
+              <a:rPr sz="1500">
+                <a:solidFill>
+                  <a:srgbClr val="22282E"/>
+                </a:solidFill>
+              </a:rPr>
+              <a:t>•  RAX — Registro que suele contener el valor de retorno</a:t>
             </a:r>
           </a:p>
         </p:txBody>
@@ -4509,7 +5066,7 @@
                   <a:srgbClr val="0B3D2E"/>
                 </a:solidFill>
               </a:rPr>
-              <a:t>✍️ Ejercicios</a:t>
+              <a:t>🧰 Herramientas y preparación</a:t>
             </a:r>
           </a:p>
         </p:txBody>
@@ -4547,82 +5104,22 @@
                   <a:srgbClr val="22282E"/>
                 </a:solidFill>
               </a:rPr>
-              <a:t>•  Enumera 6 registros de x86-64 y describe la función de cada uno.</a:t>
-            </a:r>
-          </a:p>
-          <a:p>
-            <a:pPr>
-              <a:spcAft>
-                <a:spcPts val="600"/>
-              </a:spcAft>
-            </a:pPr>
-            <a:r>
-              <a:rPr sz="1500">
-                <a:solidFill>
-                  <a:srgbClr val="22282E"/>
-                </a:solidFill>
-              </a:rPr>
-              <a:t>•  Explica qué guarda la pila cuando se llama a una función y en qué orden.</a:t>
-            </a:r>
-          </a:p>
-          <a:p>
-            <a:pPr>
-              <a:spcAft>
-                <a:spcPts val="600"/>
-              </a:spcAft>
-            </a:pPr>
-            <a:r>
-              <a:rPr sz="1500">
-                <a:solidFill>
-                  <a:srgbClr val="22282E"/>
-                </a:solidFill>
-              </a:rPr>
-              <a:t>•  Desensambla una función y anota a qué línea de C corresponde cada instrucción clave.</a:t>
-            </a:r>
-          </a:p>
-          <a:p>
-            <a:pPr>
-              <a:spcAft>
-                <a:spcPts val="600"/>
-              </a:spcAft>
-            </a:pPr>
-            <a:r>
-              <a:rPr sz="1500">
-                <a:solidFill>
-                  <a:srgbClr val="22282E"/>
-                </a:solidFill>
-              </a:rPr>
-              <a:t>•  Escribe en little-endian los bytes de la dirección 0x00401136.</a:t>
-            </a:r>
-          </a:p>
-          <a:p>
-            <a:pPr>
-              <a:spcAft>
-                <a:spcPts val="600"/>
-              </a:spcAft>
-            </a:pPr>
-            <a:r>
-              <a:rPr sz="1500">
-                <a:solidFill>
-                  <a:srgbClr val="22282E"/>
-                </a:solidFill>
-              </a:rPr>
-              <a:t>•  Explica cómo un overflow de un buffer en la pila puede alterar RIP.</a:t>
-            </a:r>
-          </a:p>
-          <a:p>
-            <a:pPr>
-              <a:spcAft>
-                <a:spcPts val="600"/>
-              </a:spcAft>
-            </a:pPr>
-            <a:r>
-              <a:rPr sz="1500">
-                <a:solidFill>
-                  <a:srgbClr val="22282E"/>
-                </a:solidFill>
-              </a:rPr>
-              <a:t>•  Investiga qué protegen ASLR, NX/DEP y los stack canaries, cada uno contra qué.</a:t>
+              <a:t>•  En Linux/Kali usaremos gcc para compilar, objdump y readelf para inspeccionar binarios y gdb como depurador, idealmente potenciado con GEF o pwndbg para una vista más rica de registros y pila. Puedes…</a:t>
+            </a:r>
+          </a:p>
+          <a:p>
+            <a:pPr>
+              <a:spcAft>
+                <a:spcPts val="600"/>
+              </a:spcAft>
+            </a:pPr>
+            <a:r>
+              <a:rPr sz="1500">
+                <a:solidFill>
+                  <a:srgbClr val="22282E"/>
+                </a:solidFill>
+              </a:rPr>
+              <a:t>•  Trabaja siempre en tu VM de laboratorio. Un programa en C sencillo basta para compilar, desensamblar y depurar. Para estudiar direcciones estables durante el aprendizaje puedes desactivar ASLR en el…</a:t>
             </a:r>
           </a:p>
         </p:txBody>
@@ -4673,7 +5170,7 @@
                   <a:srgbClr val="0B3D2E"/>
                 </a:solidFill>
               </a:rPr>
-              <a:t>📝 Reto verificable</a:t>
+              <a:t>🧪 Laboratorio guiado</a:t>
             </a:r>
           </a:p>
         </p:txBody>
@@ -4711,22 +5208,97 @@
                   <a:srgbClr val="22282E"/>
                 </a:solidFill>
               </a:rPr>
-              <a:t>•  Toma un programa C con una función que reciba argumentos y realice un cálculo. Compílalo, desensámblalo y, con gdb, produce un "mapa" anotado que muestre: los registros con los argumentos al entrar en la función, la ubicación de la dirección de retorno en la pila, y la instrucción ret que la consume. Explica en qué punto un atacante intentaría intervenir.</a:t>
-            </a:r>
-          </a:p>
-          <a:p>
-            <a:pPr>
-              <a:spcAft>
-                <a:spcPts val="600"/>
-              </a:spcAft>
-            </a:pPr>
-            <a:r>
-              <a:rPr sz="1500">
-                <a:solidFill>
-                  <a:srgbClr val="22282E"/>
-                </a:solidFill>
-              </a:rPr>
-              <a:t>•  Criterio de aceptación: el mapa identifica correctamente los registros de argumentos según System V, señala la dirección de retorno en el volcado de la pila (x/gx $rsp) y explica coherentemente la relación entre sobrescribir esa dirección y el control de RIP. Reproducible con los mismos comandos de gdb.</a:t>
+              <a:t>•  Compilar y desensamblar. Crea suma.c con una función suma(a, b) llamada desde main, compílala sin optimizar y desensámblala:</a:t>
+            </a:r>
+          </a:p>
+          <a:p>
+            <a:pPr>
+              <a:spcAft>
+                <a:spcPts val="600"/>
+              </a:spcAft>
+            </a:pPr>
+            <a:r>
+              <a:rPr sz="1500">
+                <a:solidFill>
+                  <a:srgbClr val="22282E"/>
+                </a:solidFill>
+              </a:rPr>
+              <a:t>•  Identifica el prólogo (push rbp, mov rbp, rsp), las operaciones y el ret.</a:t>
+            </a:r>
+          </a:p>
+          <a:p>
+            <a:pPr>
+              <a:spcAft>
+                <a:spcPts val="600"/>
+              </a:spcAft>
+            </a:pPr>
+            <a:r>
+              <a:rPr sz="1500">
+                <a:solidFill>
+                  <a:srgbClr val="22282E"/>
+                </a:solidFill>
+              </a:rPr>
+              <a:t>•  Registros en gdb. Detente al entrar en la función y observa los argumentos:</a:t>
+            </a:r>
+          </a:p>
+          <a:p>
+            <a:pPr>
+              <a:spcAft>
+                <a:spcPts val="600"/>
+              </a:spcAft>
+            </a:pPr>
+            <a:r>
+              <a:rPr sz="1500">
+                <a:solidFill>
+                  <a:srgbClr val="22282E"/>
+                </a:solidFill>
+              </a:rPr>
+              <a:t>•  Comprueba que los argumentos llegan en RDI y RSI según System V.</a:t>
+            </a:r>
+          </a:p>
+          <a:p>
+            <a:pPr>
+              <a:spcAft>
+                <a:spcPts val="600"/>
+              </a:spcAft>
+            </a:pPr>
+            <a:r>
+              <a:rPr sz="1500">
+                <a:solidFill>
+                  <a:srgbClr val="22282E"/>
+                </a:solidFill>
+              </a:rPr>
+              <a:t>•  Ver la pila. En el breakpoint, examina la memoria de la pila y localiza la dirección de retorno guardada:</a:t>
+            </a:r>
+          </a:p>
+          <a:p>
+            <a:pPr>
+              <a:spcAft>
+                <a:spcPts val="600"/>
+              </a:spcAft>
+            </a:pPr>
+            <a:r>
+              <a:rPr sz="1500">
+                <a:solidFill>
+                  <a:srgbClr val="22282E"/>
+                </a:solidFill>
+              </a:rPr>
+              <a:t>•  Seguir call/ret. Ejecuta instrucción a instrucción con stepi y observa cómo ret restaura RIP tomando el valor desde la pila.</a:t>
+            </a:r>
+          </a:p>
+          <a:p>
+            <a:pPr>
+              <a:spcAft>
+                <a:spcPts val="600"/>
+              </a:spcAft>
+            </a:pPr>
+            <a:r>
+              <a:rPr sz="1500">
+                <a:solidFill>
+                  <a:srgbClr val="22282E"/>
+                </a:solidFill>
+              </a:rPr>
+              <a:t>•  Endianness. Escribe un entero conocido en memoria y examínalo byte a byte para comprobar el orden little-endian.</a:t>
             </a:r>
           </a:p>
         </p:txBody>
